--- a/examples/proposta-comercial.pptx
+++ b/examples/proposta-comercial.pptx
@@ -3156,8 +3156,8 @@
         </p:nvSpPr>
         <p:spPr>
           <a:xfrm>
-            <a:off x="731520" y="2194560"/>
-            <a:ext cx="10698480" cy="1463040"/>
+            <a:off x="731520" y="1920240"/>
+            <a:ext cx="10698480" cy="1737360"/>
           </a:xfrm>
           <a:prstGeom prst="rect">
             <a:avLst/>
@@ -3214,6 +3214,41 @@
                 <a:latin typeface="Segoe UI"/>
               </a:rPr>
               <a:t>Monitoramento de energia por máquina - válida até 30/09/2026</a:t>
+            </a:r>
+          </a:p>
+        </p:txBody>
+      </p:sp>
+      <p:sp>
+        <p:nvSpPr>
+          <p:cNvPr id="5" name="TextBox 4"/>
+          <p:cNvSpPr txBox="1"/>
+          <p:nvPr/>
+        </p:nvSpPr>
+        <p:spPr>
+          <a:xfrm>
+            <a:off x="731520" y="5669280"/>
+            <a:ext cx="10698480" cy="457200"/>
+          </a:xfrm>
+          <a:prstGeom prst="rect">
+            <a:avLst/>
+          </a:prstGeom>
+          <a:noFill/>
+        </p:spPr>
+        <p:txBody>
+          <a:bodyPr wrap="square" anchor="t" lIns="45720" rIns="45720" tIns="27432" bIns="27432">
+            <a:spAutoFit/>
+          </a:bodyPr>
+          <a:lstStyle/>
+          <a:p>
+            <a:pPr algn="l"/>
+            <a:r>
+              <a:rPr sz="1300" b="0" i="0">
+                <a:solidFill>
+                  <a:srgbClr val="BFC9D4"/>
+                </a:solidFill>
+                <a:latin typeface="Segoe UI"/>
+              </a:rPr>
+              <a:t>2026-09-01</a:t>
             </a:r>
           </a:p>
         </p:txBody>
@@ -3277,8 +3312,8 @@
         </p:nvSpPr>
         <p:spPr>
           <a:xfrm>
-            <a:off x="10817352" y="6217920"/>
-            <a:ext cx="914400" cy="365760"/>
+            <a:off x="7772400" y="91440"/>
+            <a:ext cx="3959352" cy="228600"/>
           </a:xfrm>
           <a:prstGeom prst="rect">
             <a:avLst/>
@@ -3293,6 +3328,41 @@
           <a:p>
             <a:pPr algn="r"/>
             <a:r>
+              <a:rPr sz="900" b="0" i="0">
+                <a:solidFill>
+                  <a:srgbClr val="858585"/>
+                </a:solidFill>
+                <a:latin typeface="Segoe UI"/>
+              </a:rPr>
+              <a:t>2026-09-01</a:t>
+            </a:r>
+          </a:p>
+        </p:txBody>
+      </p:sp>
+      <p:sp>
+        <p:nvSpPr>
+          <p:cNvPr id="4" name="TextBox 3"/>
+          <p:cNvSpPr txBox="1"/>
+          <p:nvPr/>
+        </p:nvSpPr>
+        <p:spPr>
+          <a:xfrm>
+            <a:off x="10817352" y="6217920"/>
+            <a:ext cx="914400" cy="365760"/>
+          </a:xfrm>
+          <a:prstGeom prst="rect">
+            <a:avLst/>
+          </a:prstGeom>
+          <a:noFill/>
+        </p:spPr>
+        <p:txBody>
+          <a:bodyPr wrap="square" anchor="ctr" lIns="45720" rIns="45720" tIns="27432" bIns="27432">
+            <a:spAutoFit/>
+          </a:bodyPr>
+          <a:lstStyle/>
+          <a:p>
+            <a:pPr algn="r"/>
+            <a:r>
               <a:rPr sz="1000" b="0" i="0">
                 <a:solidFill>
                   <a:srgbClr val="858585"/>
@@ -3306,7 +3376,7 @@
       </p:sp>
       <p:sp>
         <p:nvSpPr>
-          <p:cNvPr id="4" name="Rectangle 3"/>
+          <p:cNvPr id="5" name="Rectangle 4"/>
           <p:cNvSpPr/>
           <p:nvPr/>
         </p:nvSpPr>
@@ -3350,7 +3420,7 @@
       </p:sp>
       <p:sp>
         <p:nvSpPr>
-          <p:cNvPr id="5" name="Rectangle 4"/>
+          <p:cNvPr id="6" name="Rectangle 5"/>
           <p:cNvSpPr/>
           <p:nvPr/>
         </p:nvSpPr>
@@ -3394,7 +3464,7 @@
       </p:sp>
       <p:sp>
         <p:nvSpPr>
-          <p:cNvPr id="6" name="TextBox 5"/>
+          <p:cNvPr id="7" name="TextBox 6"/>
           <p:cNvSpPr txBox="1"/>
           <p:nvPr/>
         </p:nvSpPr>
@@ -3429,7 +3499,7 @@
       </p:sp>
       <p:sp>
         <p:nvSpPr>
-          <p:cNvPr id="7" name="Oval 6"/>
+          <p:cNvPr id="8" name="Oval 7"/>
           <p:cNvSpPr/>
           <p:nvPr/>
         </p:nvSpPr>
@@ -3482,7 +3552,7 @@
       </p:sp>
       <p:sp>
         <p:nvSpPr>
-          <p:cNvPr id="8" name="TextBox 7"/>
+          <p:cNvPr id="9" name="TextBox 8"/>
           <p:cNvSpPr txBox="1"/>
           <p:nvPr/>
         </p:nvSpPr>
@@ -3517,7 +3587,7 @@
       </p:sp>
       <p:sp>
         <p:nvSpPr>
-          <p:cNvPr id="9" name="Oval 8"/>
+          <p:cNvPr id="10" name="Oval 9"/>
           <p:cNvSpPr/>
           <p:nvPr/>
         </p:nvSpPr>
@@ -3570,7 +3640,7 @@
       </p:sp>
       <p:sp>
         <p:nvSpPr>
-          <p:cNvPr id="10" name="TextBox 9"/>
+          <p:cNvPr id="11" name="TextBox 10"/>
           <p:cNvSpPr txBox="1"/>
           <p:nvPr/>
         </p:nvSpPr>
@@ -3605,7 +3675,7 @@
       </p:sp>
       <p:sp>
         <p:nvSpPr>
-          <p:cNvPr id="11" name="Oval 10"/>
+          <p:cNvPr id="12" name="Oval 11"/>
           <p:cNvSpPr/>
           <p:nvPr/>
         </p:nvSpPr>
@@ -3658,7 +3728,7 @@
       </p:sp>
       <p:sp>
         <p:nvSpPr>
-          <p:cNvPr id="12" name="TextBox 11"/>
+          <p:cNvPr id="13" name="TextBox 12"/>
           <p:cNvSpPr txBox="1"/>
           <p:nvPr/>
         </p:nvSpPr>
@@ -3693,7 +3763,7 @@
       </p:sp>
       <p:sp>
         <p:nvSpPr>
-          <p:cNvPr id="13" name="Rectangle 12"/>
+          <p:cNvPr id="14" name="Rectangle 13"/>
           <p:cNvSpPr/>
           <p:nvPr/>
         </p:nvSpPr>
@@ -3739,7 +3809,7 @@
       </p:sp>
       <p:sp>
         <p:nvSpPr>
-          <p:cNvPr id="14" name="TextBox 13"/>
+          <p:cNvPr id="15" name="TextBox 14"/>
           <p:cNvSpPr txBox="1"/>
           <p:nvPr/>
         </p:nvSpPr>
@@ -3849,8 +3919,8 @@
         </p:nvSpPr>
         <p:spPr>
           <a:xfrm>
-            <a:off x="10817352" y="6217920"/>
-            <a:ext cx="914400" cy="365760"/>
+            <a:off x="7772400" y="91440"/>
+            <a:ext cx="3959352" cy="228600"/>
           </a:xfrm>
           <a:prstGeom prst="rect">
             <a:avLst/>
@@ -3865,13 +3935,13 @@
           <a:p>
             <a:pPr algn="r"/>
             <a:r>
-              <a:rPr sz="1000" b="0" i="0">
+              <a:rPr sz="900" b="0" i="0">
                 <a:solidFill>
                   <a:srgbClr val="858585"/>
                 </a:solidFill>
                 <a:latin typeface="Segoe UI"/>
               </a:rPr>
-              <a:t>3</a:t>
+              <a:t>2026-09-01</a:t>
             </a:r>
           </a:p>
         </p:txBody>
@@ -3884,8 +3954,8 @@
         </p:nvSpPr>
         <p:spPr>
           <a:xfrm>
-            <a:off x="457200" y="1737360"/>
-            <a:ext cx="11274552" cy="1828800"/>
+            <a:off x="10817352" y="6217920"/>
+            <a:ext cx="914400" cy="365760"/>
           </a:xfrm>
           <a:prstGeom prst="rect">
             <a:avLst/>
@@ -3898,15 +3968,15 @@
           </a:bodyPr>
           <a:lstStyle/>
           <a:p>
-            <a:pPr algn="ctr"/>
-            <a:r>
-              <a:rPr sz="8000" b="1" i="0">
-                <a:solidFill>
-                  <a:srgbClr val="1B2A49"/>
+            <a:pPr algn="r"/>
+            <a:r>
+              <a:rPr sz="1000" b="0" i="0">
+                <a:solidFill>
+                  <a:srgbClr val="858585"/>
                 </a:solidFill>
                 <a:latin typeface="Segoe UI"/>
               </a:rPr>
-              <a:t>R$ 2,1 mi</a:t>
+              <a:t>3</a:t>
             </a:r>
           </a:p>
         </p:txBody>
@@ -3919,8 +3989,8 @@
         </p:nvSpPr>
         <p:spPr>
           <a:xfrm>
-            <a:off x="457200" y="3657600"/>
-            <a:ext cx="11274552" cy="548640"/>
+            <a:off x="457200" y="1737360"/>
+            <a:ext cx="11274552" cy="1828800"/>
           </a:xfrm>
           <a:prstGeom prst="rect">
             <a:avLst/>
@@ -3928,6 +3998,41 @@
           <a:noFill/>
         </p:spPr>
         <p:txBody>
+          <a:bodyPr wrap="square" anchor="ctr" lIns="45720" rIns="45720" tIns="27432" bIns="27432">
+            <a:spAutoFit/>
+          </a:bodyPr>
+          <a:lstStyle/>
+          <a:p>
+            <a:pPr algn="ctr"/>
+            <a:r>
+              <a:rPr sz="8000" b="1" i="0">
+                <a:solidFill>
+                  <a:srgbClr val="1B2A49"/>
+                </a:solidFill>
+                <a:latin typeface="Segoe UI"/>
+              </a:rPr>
+              <a:t>R$ 2,1 mi</a:t>
+            </a:r>
+          </a:p>
+        </p:txBody>
+      </p:sp>
+      <p:sp>
+        <p:nvSpPr>
+          <p:cNvPr id="6" name="TextBox 5"/>
+          <p:cNvSpPr txBox="1"/>
+          <p:nvPr/>
+        </p:nvSpPr>
+        <p:spPr>
+          <a:xfrm>
+            <a:off x="457200" y="3657600"/>
+            <a:ext cx="11274552" cy="548640"/>
+          </a:xfrm>
+          <a:prstGeom prst="rect">
+            <a:avLst/>
+          </a:prstGeom>
+          <a:noFill/>
+        </p:spPr>
+        <p:txBody>
           <a:bodyPr wrap="square" anchor="t" lIns="45720" rIns="45720" tIns="27432" bIns="27432">
             <a:spAutoFit/>
           </a:bodyPr>
@@ -3948,7 +4053,7 @@
       </p:sp>
       <p:sp>
         <p:nvSpPr>
-          <p:cNvPr id="6" name="TextBox 5"/>
+          <p:cNvPr id="7" name="TextBox 6"/>
           <p:cNvSpPr txBox="1"/>
           <p:nvPr/>
         </p:nvSpPr>
@@ -4040,8 +4145,8 @@
         </p:nvSpPr>
         <p:spPr>
           <a:xfrm>
-            <a:off x="10817352" y="6217920"/>
-            <a:ext cx="914400" cy="365760"/>
+            <a:off x="7772400" y="91440"/>
+            <a:ext cx="3959352" cy="228600"/>
           </a:xfrm>
           <a:prstGeom prst="rect">
             <a:avLst/>
@@ -4056,6 +4161,41 @@
           <a:p>
             <a:pPr algn="r"/>
             <a:r>
+              <a:rPr sz="900" b="0" i="0">
+                <a:solidFill>
+                  <a:srgbClr val="858585"/>
+                </a:solidFill>
+                <a:latin typeface="Segoe UI"/>
+              </a:rPr>
+              <a:t>2026-09-01</a:t>
+            </a:r>
+          </a:p>
+        </p:txBody>
+      </p:sp>
+      <p:sp>
+        <p:nvSpPr>
+          <p:cNvPr id="4" name="TextBox 3"/>
+          <p:cNvSpPr txBox="1"/>
+          <p:nvPr/>
+        </p:nvSpPr>
+        <p:spPr>
+          <a:xfrm>
+            <a:off x="10817352" y="6217920"/>
+            <a:ext cx="914400" cy="365760"/>
+          </a:xfrm>
+          <a:prstGeom prst="rect">
+            <a:avLst/>
+          </a:prstGeom>
+          <a:noFill/>
+        </p:spPr>
+        <p:txBody>
+          <a:bodyPr wrap="square" anchor="ctr" lIns="45720" rIns="45720" tIns="27432" bIns="27432">
+            <a:spAutoFit/>
+          </a:bodyPr>
+          <a:lstStyle/>
+          <a:p>
+            <a:pPr algn="r"/>
+            <a:r>
               <a:rPr sz="1000" b="0" i="0">
                 <a:solidFill>
                   <a:srgbClr val="858585"/>
@@ -4069,7 +4209,7 @@
       </p:sp>
       <p:sp>
         <p:nvSpPr>
-          <p:cNvPr id="4" name="Pentagon 3"/>
+          <p:cNvPr id="5" name="Pentagon 4"/>
           <p:cNvSpPr/>
           <p:nvPr/>
         </p:nvSpPr>
@@ -4122,7 +4262,7 @@
       </p:sp>
       <p:sp>
         <p:nvSpPr>
-          <p:cNvPr id="5" name="Chevron 4"/>
+          <p:cNvPr id="6" name="Chevron 5"/>
           <p:cNvSpPr/>
           <p:nvPr/>
         </p:nvSpPr>
@@ -4175,7 +4315,7 @@
       </p:sp>
       <p:sp>
         <p:nvSpPr>
-          <p:cNvPr id="6" name="Chevron 5"/>
+          <p:cNvPr id="7" name="Chevron 6"/>
           <p:cNvSpPr/>
           <p:nvPr/>
         </p:nvSpPr>
@@ -4228,7 +4368,7 @@
       </p:sp>
       <p:sp>
         <p:nvSpPr>
-          <p:cNvPr id="7" name="Chevron 6"/>
+          <p:cNvPr id="8" name="Chevron 7"/>
           <p:cNvSpPr/>
           <p:nvPr/>
         </p:nvSpPr>
@@ -4338,8 +4478,8 @@
         </p:nvSpPr>
         <p:spPr>
           <a:xfrm>
-            <a:off x="10817352" y="6217920"/>
-            <a:ext cx="914400" cy="365760"/>
+            <a:off x="7772400" y="91440"/>
+            <a:ext cx="3959352" cy="228600"/>
           </a:xfrm>
           <a:prstGeom prst="rect">
             <a:avLst/>
@@ -4354,6 +4494,41 @@
           <a:p>
             <a:pPr algn="r"/>
             <a:r>
+              <a:rPr sz="900" b="0" i="0">
+                <a:solidFill>
+                  <a:srgbClr val="858585"/>
+                </a:solidFill>
+                <a:latin typeface="Segoe UI"/>
+              </a:rPr>
+              <a:t>2026-09-01</a:t>
+            </a:r>
+          </a:p>
+        </p:txBody>
+      </p:sp>
+      <p:sp>
+        <p:nvSpPr>
+          <p:cNvPr id="4" name="TextBox 3"/>
+          <p:cNvSpPr txBox="1"/>
+          <p:nvPr/>
+        </p:nvSpPr>
+        <p:spPr>
+          <a:xfrm>
+            <a:off x="10817352" y="6217920"/>
+            <a:ext cx="914400" cy="365760"/>
+          </a:xfrm>
+          <a:prstGeom prst="rect">
+            <a:avLst/>
+          </a:prstGeom>
+          <a:noFill/>
+        </p:spPr>
+        <p:txBody>
+          <a:bodyPr wrap="square" anchor="ctr" lIns="45720" rIns="45720" tIns="27432" bIns="27432">
+            <a:spAutoFit/>
+          </a:bodyPr>
+          <a:lstStyle/>
+          <a:p>
+            <a:pPr algn="r"/>
+            <a:r>
               <a:rPr sz="1000" b="0" i="0">
                 <a:solidFill>
                   <a:srgbClr val="858585"/>
@@ -4367,7 +4542,7 @@
       </p:sp>
       <p:graphicFrame>
         <p:nvGraphicFramePr>
-          <p:cNvPr id="4" name="Table 3"/>
+          <p:cNvPr id="5" name="Table 4"/>
           <p:cNvGraphicFramePr>
             <a:graphicFrameLocks noGrp="1"/>
           </p:cNvGraphicFramePr>
@@ -4806,8 +4981,8 @@
         </p:nvSpPr>
         <p:spPr>
           <a:xfrm>
-            <a:off x="10817352" y="6217920"/>
-            <a:ext cx="914400" cy="365760"/>
+            <a:off x="7772400" y="91440"/>
+            <a:ext cx="3959352" cy="228600"/>
           </a:xfrm>
           <a:prstGeom prst="rect">
             <a:avLst/>
@@ -4822,6 +4997,41 @@
           <a:p>
             <a:pPr algn="r"/>
             <a:r>
+              <a:rPr sz="900" b="0" i="0">
+                <a:solidFill>
+                  <a:srgbClr val="858585"/>
+                </a:solidFill>
+                <a:latin typeface="Segoe UI"/>
+              </a:rPr>
+              <a:t>2026-09-01</a:t>
+            </a:r>
+          </a:p>
+        </p:txBody>
+      </p:sp>
+      <p:sp>
+        <p:nvSpPr>
+          <p:cNvPr id="4" name="TextBox 3"/>
+          <p:cNvSpPr txBox="1"/>
+          <p:nvPr/>
+        </p:nvSpPr>
+        <p:spPr>
+          <a:xfrm>
+            <a:off x="10817352" y="6217920"/>
+            <a:ext cx="914400" cy="365760"/>
+          </a:xfrm>
+          <a:prstGeom prst="rect">
+            <a:avLst/>
+          </a:prstGeom>
+          <a:noFill/>
+        </p:spPr>
+        <p:txBody>
+          <a:bodyPr wrap="square" anchor="ctr" lIns="45720" rIns="45720" tIns="27432" bIns="27432">
+            <a:spAutoFit/>
+          </a:bodyPr>
+          <a:lstStyle/>
+          <a:p>
+            <a:pPr algn="r"/>
+            <a:r>
               <a:rPr sz="1000" b="0" i="0">
                 <a:solidFill>
                   <a:srgbClr val="858585"/>
@@ -4835,7 +5045,7 @@
       </p:sp>
       <p:sp>
         <p:nvSpPr>
-          <p:cNvPr id="4" name="Rectangle 3"/>
+          <p:cNvPr id="5" name="Rectangle 4"/>
           <p:cNvSpPr/>
           <p:nvPr/>
         </p:nvSpPr>
@@ -4879,7 +5089,7 @@
       </p:sp>
       <p:sp>
         <p:nvSpPr>
-          <p:cNvPr id="5" name="Oval 4"/>
+          <p:cNvPr id="6" name="Oval 5"/>
           <p:cNvSpPr/>
           <p:nvPr/>
         </p:nvSpPr>
@@ -4925,7 +5135,7 @@
       </p:sp>
       <p:sp>
         <p:nvSpPr>
-          <p:cNvPr id="6" name="TextBox 5"/>
+          <p:cNvPr id="7" name="TextBox 6"/>
           <p:cNvSpPr txBox="1"/>
           <p:nvPr/>
         </p:nvSpPr>
@@ -4960,7 +5170,7 @@
       </p:sp>
       <p:sp>
         <p:nvSpPr>
-          <p:cNvPr id="7" name="TextBox 6"/>
+          <p:cNvPr id="8" name="TextBox 7"/>
           <p:cNvSpPr txBox="1"/>
           <p:nvPr/>
         </p:nvSpPr>
@@ -4995,7 +5205,7 @@
       </p:sp>
       <p:sp>
         <p:nvSpPr>
-          <p:cNvPr id="8" name="Oval 7"/>
+          <p:cNvPr id="9" name="Oval 8"/>
           <p:cNvSpPr/>
           <p:nvPr/>
         </p:nvSpPr>
@@ -5041,7 +5251,7 @@
       </p:sp>
       <p:sp>
         <p:nvSpPr>
-          <p:cNvPr id="9" name="TextBox 8"/>
+          <p:cNvPr id="10" name="TextBox 9"/>
           <p:cNvSpPr txBox="1"/>
           <p:nvPr/>
         </p:nvSpPr>
@@ -5076,7 +5286,7 @@
       </p:sp>
       <p:sp>
         <p:nvSpPr>
-          <p:cNvPr id="10" name="TextBox 9"/>
+          <p:cNvPr id="11" name="TextBox 10"/>
           <p:cNvSpPr txBox="1"/>
           <p:nvPr/>
         </p:nvSpPr>
@@ -5111,7 +5321,7 @@
       </p:sp>
       <p:sp>
         <p:nvSpPr>
-          <p:cNvPr id="11" name="Oval 10"/>
+          <p:cNvPr id="12" name="Oval 11"/>
           <p:cNvSpPr/>
           <p:nvPr/>
         </p:nvSpPr>
@@ -5157,7 +5367,7 @@
       </p:sp>
       <p:sp>
         <p:nvSpPr>
-          <p:cNvPr id="12" name="TextBox 11"/>
+          <p:cNvPr id="13" name="TextBox 12"/>
           <p:cNvSpPr txBox="1"/>
           <p:nvPr/>
         </p:nvSpPr>
@@ -5192,7 +5402,7 @@
       </p:sp>
       <p:sp>
         <p:nvSpPr>
-          <p:cNvPr id="13" name="TextBox 12"/>
+          <p:cNvPr id="14" name="TextBox 13"/>
           <p:cNvSpPr txBox="1"/>
           <p:nvPr/>
         </p:nvSpPr>
@@ -5227,7 +5437,7 @@
       </p:sp>
       <p:sp>
         <p:nvSpPr>
-          <p:cNvPr id="14" name="Oval 13"/>
+          <p:cNvPr id="15" name="Oval 14"/>
           <p:cNvSpPr/>
           <p:nvPr/>
         </p:nvSpPr>
@@ -5271,7 +5481,7 @@
       </p:sp>
       <p:sp>
         <p:nvSpPr>
-          <p:cNvPr id="15" name="TextBox 14"/>
+          <p:cNvPr id="16" name="TextBox 15"/>
           <p:cNvSpPr txBox="1"/>
           <p:nvPr/>
         </p:nvSpPr>
@@ -5363,8 +5573,8 @@
         </p:nvSpPr>
         <p:spPr>
           <a:xfrm>
-            <a:off x="10817352" y="6217920"/>
-            <a:ext cx="914400" cy="365760"/>
+            <a:off x="7772400" y="91440"/>
+            <a:ext cx="3959352" cy="228600"/>
           </a:xfrm>
           <a:prstGeom prst="rect">
             <a:avLst/>
@@ -5379,6 +5589,41 @@
           <a:p>
             <a:pPr algn="r"/>
             <a:r>
+              <a:rPr sz="900" b="0" i="0">
+                <a:solidFill>
+                  <a:srgbClr val="858585"/>
+                </a:solidFill>
+                <a:latin typeface="Segoe UI"/>
+              </a:rPr>
+              <a:t>2026-09-01</a:t>
+            </a:r>
+          </a:p>
+        </p:txBody>
+      </p:sp>
+      <p:sp>
+        <p:nvSpPr>
+          <p:cNvPr id="4" name="TextBox 3"/>
+          <p:cNvSpPr txBox="1"/>
+          <p:nvPr/>
+        </p:nvSpPr>
+        <p:spPr>
+          <a:xfrm>
+            <a:off x="10817352" y="6217920"/>
+            <a:ext cx="914400" cy="365760"/>
+          </a:xfrm>
+          <a:prstGeom prst="rect">
+            <a:avLst/>
+          </a:prstGeom>
+          <a:noFill/>
+        </p:spPr>
+        <p:txBody>
+          <a:bodyPr wrap="square" anchor="ctr" lIns="45720" rIns="45720" tIns="27432" bIns="27432">
+            <a:spAutoFit/>
+          </a:bodyPr>
+          <a:lstStyle/>
+          <a:p>
+            <a:pPr algn="r"/>
+            <a:r>
               <a:rPr sz="1000" b="0" i="0">
                 <a:solidFill>
                   <a:srgbClr val="858585"/>
@@ -5392,7 +5637,7 @@
       </p:sp>
       <p:sp>
         <p:nvSpPr>
-          <p:cNvPr id="4" name="Rectangle 3"/>
+          <p:cNvPr id="5" name="Rectangle 4"/>
           <p:cNvSpPr/>
           <p:nvPr/>
         </p:nvSpPr>
@@ -5436,7 +5681,7 @@
       </p:sp>
       <p:sp>
         <p:nvSpPr>
-          <p:cNvPr id="5" name="Rectangle 4"/>
+          <p:cNvPr id="6" name="Rectangle 5"/>
           <p:cNvSpPr/>
           <p:nvPr/>
         </p:nvSpPr>
@@ -5480,7 +5725,7 @@
       </p:sp>
       <p:sp>
         <p:nvSpPr>
-          <p:cNvPr id="6" name="TextBox 5"/>
+          <p:cNvPr id="7" name="TextBox 6"/>
           <p:cNvSpPr txBox="1"/>
           <p:nvPr/>
         </p:nvSpPr>
@@ -5515,7 +5760,7 @@
       </p:sp>
       <p:sp>
         <p:nvSpPr>
-          <p:cNvPr id="7" name="TextBox 6"/>
+          <p:cNvPr id="8" name="TextBox 7"/>
           <p:cNvSpPr txBox="1"/>
           <p:nvPr/>
         </p:nvSpPr>
@@ -5598,7 +5843,7 @@
       </p:sp>
       <p:sp>
         <p:nvSpPr>
-          <p:cNvPr id="8" name="Rectangle 7"/>
+          <p:cNvPr id="9" name="Rectangle 8"/>
           <p:cNvSpPr/>
           <p:nvPr/>
         </p:nvSpPr>
@@ -5642,7 +5887,7 @@
       </p:sp>
       <p:sp>
         <p:nvSpPr>
-          <p:cNvPr id="9" name="Rectangle 8"/>
+          <p:cNvPr id="10" name="Rectangle 9"/>
           <p:cNvSpPr/>
           <p:nvPr/>
         </p:nvSpPr>
@@ -5686,7 +5931,7 @@
       </p:sp>
       <p:sp>
         <p:nvSpPr>
-          <p:cNvPr id="10" name="TextBox 9"/>
+          <p:cNvPr id="11" name="TextBox 10"/>
           <p:cNvSpPr txBox="1"/>
           <p:nvPr/>
         </p:nvSpPr>
@@ -5721,7 +5966,7 @@
       </p:sp>
       <p:sp>
         <p:nvSpPr>
-          <p:cNvPr id="11" name="TextBox 10"/>
+          <p:cNvPr id="12" name="TextBox 11"/>
           <p:cNvSpPr txBox="1"/>
           <p:nvPr/>
         </p:nvSpPr>
@@ -5861,8 +6106,8 @@
         </p:nvSpPr>
         <p:spPr>
           <a:xfrm>
-            <a:off x="10817352" y="6217920"/>
-            <a:ext cx="914400" cy="365760"/>
+            <a:off x="7772400" y="91440"/>
+            <a:ext cx="3959352" cy="228600"/>
           </a:xfrm>
           <a:prstGeom prst="rect">
             <a:avLst/>
@@ -5877,6 +6122,41 @@
           <a:p>
             <a:pPr algn="r"/>
             <a:r>
+              <a:rPr sz="900" b="0" i="0">
+                <a:solidFill>
+                  <a:srgbClr val="858585"/>
+                </a:solidFill>
+                <a:latin typeface="Segoe UI"/>
+              </a:rPr>
+              <a:t>2026-09-01</a:t>
+            </a:r>
+          </a:p>
+        </p:txBody>
+      </p:sp>
+      <p:sp>
+        <p:nvSpPr>
+          <p:cNvPr id="4" name="TextBox 3"/>
+          <p:cNvSpPr txBox="1"/>
+          <p:nvPr/>
+        </p:nvSpPr>
+        <p:spPr>
+          <a:xfrm>
+            <a:off x="10817352" y="6217920"/>
+            <a:ext cx="914400" cy="365760"/>
+          </a:xfrm>
+          <a:prstGeom prst="rect">
+            <a:avLst/>
+          </a:prstGeom>
+          <a:noFill/>
+        </p:spPr>
+        <p:txBody>
+          <a:bodyPr wrap="square" anchor="ctr" lIns="45720" rIns="45720" tIns="27432" bIns="27432">
+            <a:spAutoFit/>
+          </a:bodyPr>
+          <a:lstStyle/>
+          <a:p>
+            <a:pPr algn="r"/>
+            <a:r>
               <a:rPr sz="1000" b="0" i="0">
                 <a:solidFill>
                   <a:srgbClr val="858585"/>
@@ -5890,7 +6170,7 @@
       </p:sp>
       <p:graphicFrame>
         <p:nvGraphicFramePr>
-          <p:cNvPr id="4" name="Table 3"/>
+          <p:cNvPr id="5" name="Table 4"/>
           <p:cNvGraphicFramePr>
             <a:graphicFrameLocks noGrp="1"/>
           </p:cNvGraphicFramePr>
